--- a/docs/pptx/whole/jx-linsubhr-disc-akikdigo.pptx
+++ b/docs/pptx/whole/jx-linsubhr-disc-akikdigo.pptx
@@ -5339,7 +5339,7 @@
           <p:spPr>
             <a:xfrm>
               <a:off x="817517" y="1896563"/>
-              <a:ext cx="4933462" cy="82021"/>
+              <a:ext cx="5784860" cy="82021"/>
             </a:xfrm>
             <a:prstGeom prst="rect">
               <a:avLst/>
@@ -5371,7 +5371,7 @@
                   <a:latin typeface="Helvetica"/>
                   <a:cs typeface="Helvetica"/>
                 </a:rPr>
-                <a:t>subHR per 1 mL/min: 0.99 (0.98-1.00)  |  per IQR (Δ = 23.3): 0.75 (0.61-0.93)  |  IQR: [-12.8, 10.5]</a:t>
+                <a:t>subHR per 10 mL/min decline: 1.13 (1.03-1.24)  |  per IQR decline (Δ = 23.3): 1.33 (1.07-1.64)  |  IQR: [-12.8, 10.5]</a:t>
               </a:r>
             </a:p>
           </p:txBody>

--- a/docs/pptx/whole/jx-linsubhr-disc-akikdigo.pptx
+++ b/docs/pptx/whole/jx-linsubhr-disc-akikdigo.pptx
@@ -5339,7 +5339,7 @@
           <p:spPr>
             <a:xfrm>
               <a:off x="817517" y="1896563"/>
-              <a:ext cx="5784860" cy="82021"/>
+              <a:ext cx="6328013" cy="82021"/>
             </a:xfrm>
             <a:prstGeom prst="rect">
               <a:avLst/>
@@ -5371,7 +5371,7 @@
                   <a:latin typeface="Helvetica"/>
                   <a:cs typeface="Helvetica"/>
                 </a:rPr>
-                <a:t>subHR per 10 mL/min decline: 1.13 (1.03-1.24)  |  per IQR decline (Δ = 23.3): 1.33 (1.07-1.64)  |  IQR: [-12.8, 10.5]</a:t>
+                <a:t>subHR per 10 mL/min decline: 1.13 (1.03-1.24), p = 0.009  |  per IQR decline (Δ = 23.3): 1.33 (1.07-1.64)  |  IQR: [-12.8, 10.5]</a:t>
               </a:r>
             </a:p>
           </p:txBody>

--- a/docs/pptx/whole/jx-linsubhr-disc-akikdigo.pptx
+++ b/docs/pptx/whole/jx-linsubhr-disc-akikdigo.pptx
@@ -5339,7 +5339,7 @@
           <p:spPr>
             <a:xfrm>
               <a:off x="817517" y="1896563"/>
-              <a:ext cx="6328013" cy="82021"/>
+              <a:ext cx="6991776" cy="82021"/>
             </a:xfrm>
             <a:prstGeom prst="rect">
               <a:avLst/>
@@ -5371,7 +5371,7 @@
                   <a:latin typeface="Helvetica"/>
                   <a:cs typeface="Helvetica"/>
                 </a:rPr>
-                <a:t>subHR per 10 mL/min decline: 1.13 (1.03-1.24), p = 0.009  |  per IQR decline (Δ = 23.3): 1.33 (1.07-1.64)  |  IQR: [-12.8, 10.5]</a:t>
+                <a:t>subHR per 10 mL/min decline: 1.13 (1.03-1.24), p_Bonf = 0.053 (n = 6)  |  per IQR decline (Δ = 23.3): 1.33 (1.07-1.64)  |  IQR: [-12.8, 10.5]</a:t>
               </a:r>
             </a:p>
           </p:txBody>
